--- a/threebody_pk_compartment/manuscript/figures_mnras_editable.pptx
+++ b/threebody_pk_compartment/manuscript/figures_mnras_editable.pptx
@@ -3845,8 +3845,8 @@
         </p:blipFill>
         <p:spPr>
           <a:xfrm>
-            <a:off x="2627915" y="822960"/>
-            <a:ext cx="6935863" cy="4937759"/>
+            <a:off x="2617053" y="822960"/>
+            <a:ext cx="6957588" cy="4937759"/>
           </a:xfrm>
           <a:prstGeom prst="rect">
             <a:avLst/>
@@ -3877,7 +3877,7 @@
           <a:p>
             <a:r>
               <a:rPr sz="1100"/>
-              <a:t>Population-PK analysis of the mass-ratio dependence. (a) MRT versus binary–single reduced mass; (b) median lifetime versus intruder mass; (c) mean excursions versus lightest mass fraction; (d) lightest-body escape probability with logistic fit; (e) predicted versus observed MRT (R^2 = 0.67); (f) slowest half-life across the (m_2, m_3) grid.</a:t>
+              <a:t>Population-PK analysis of the mass-ratio dependence. (a) MRT versus binary–single reduced mass; (b) median lifetime versus intruder mass; (c) mean excursions versus lightest mass fraction; (d) lightest-body escape probability with logistic fit; (e) predicted versus observed MRT (R^2 = 0.30); (f) slowest half-life across the (m_2, m_3) grid.</a:t>
             </a:r>
           </a:p>
         </p:txBody>

--- a/threebody_pk_compartment/manuscript/figures_mnras_editable.pptx
+++ b/threebody_pk_compartment/manuscript/figures_mnras_editable.pptx
@@ -3877,7 +3877,7 @@
           <a:p>
             <a:r>
               <a:rPr sz="1100"/>
-              <a:t>Population-PK analysis of the mass-ratio dependence. (a) MRT versus binary–single reduced mass; (b) median lifetime versus intruder mass; (c) mean excursions versus lightest mass fraction; (d) lightest-body escape probability with logistic fit; (e) predicted versus observed MRT (R^2 = 0.30); (f) slowest half-life across the (m_2, m_3) grid.</a:t>
+              <a:t>Population-PK analysis of the mass-ratio dependence. (a) MRT versus binary–single reduced mass; (b) median lifetime versus intruder mass; (c) mean excursions versus lightest mass fraction; (d) lightest-body escape probability with logistic fit; (e) predicted versus observed median lifetime for the allometric fit, annotated with the R^2, the LMG/Shapley R^2 shares and the variance-inflation factors for (μ12, μout, M); (f) slowest half-life across the (m_2, m_3) grid.</a:t>
             </a:r>
           </a:p>
         </p:txBody>
